--- a/courses/EVM1110E/slides/W13_slides.pptx
+++ b/courses/EVM1110E/slides/W13_slides.pptx
@@ -11282,7 +11282,7 @@
                 <a:ea typeface="Alexandria" pitchFamily="34" charset="-122"/>
                 <a:cs typeface="Alexandria" pitchFamily="34" charset="-120"/>
               </a:rPr>
-              <a:t>Kraljic: khách hàng mua dịch vụ của ta thế nào; chiến lược đàm phán</a:t>
+              <a:t>Kraljic: hạng mục agency mua để giao giá trị; đàm phán giá trị với Key Account</a:t>
             </a:r>
             <a:endParaRPr lang="en-US" sz="1450" dirty="0"/>
           </a:p>
